--- a/docs/pitch/harbormaster-architecture-deck.pptx
+++ b/docs/pitch/harbormaster-architecture-deck.pptx
@@ -220,9 +220,9 @@
           </c:dLbls>
           <c:cat>
             <c:multiLvlStrRef>
-              <c:f>Sheet1!$A$2:$A$6</c:f>
+              <c:f>Sheet1!$A$2:$A$5</c:f>
               <c:multiLvlStrCache>
-                <c:ptCount val="5"/>
+                <c:ptCount val="4"/>
                 <c:lvl>
                   <c:pt idx="0">
                     <c:v>Field-mapping accuracy</c:v>
@@ -236,19 +236,16 @@
                   <c:pt idx="3">
                     <c:v>Quarantine recall</c:v>
                   </c:pt>
-                  <c:pt idx="4">
-                    <c:v>Tests passing (÷400)</c:v>
-                  </c:pt>
                 </c:lvl>
               </c:multiLvlStrCache>
             </c:multiLvlStrRef>
           </c:cat>
           <c:val>
             <c:numRef>
-              <c:f>Sheet1!$B$2:$B$6</c:f>
+              <c:f>Sheet1!$B$2:$B$5</c:f>
               <c:numCache>
                 <c:formatCode>General</c:formatCode>
-                <c:ptCount val="5"/>
+                <c:ptCount val="4"/>
                 <c:pt idx="0">
                   <c:v>0.977</c:v>
                 </c:pt>
@@ -260,9 +257,6 @@
                 </c:pt>
                 <c:pt idx="3">
                   <c:v>0.667</c:v>
-                </c:pt>
-                <c:pt idx="4">
-                  <c:v>0.87</c:v>
                 </c:pt>
               </c:numCache>
             </c:numRef>
@@ -11061,9 +11055,9 @@
             <a:tbl>
               <a:tblPr/>
               <a:tblGrid>
-                <a:gridCol w="1737360"/>
-                <a:gridCol w="1005840"/>
-                <a:gridCol w="548640"/>
+                <a:gridCol w="1371600"/>
+                <a:gridCol w="1188720"/>
+                <a:gridCol w="731520"/>
               </a:tblGrid>
               <a:tr h="0">
                 <a:tc>
@@ -11354,7 +11348,7 @@
                           <a:ea typeface="Calibri" pitchFamily="34" charset="-122"/>
                           <a:cs typeface="Calibri" pitchFamily="34" charset="-120"/>
                         </a:rPr>
-                        <a:t>97.7% (209/214 columns, 19 files)</a:t>
+                        <a:t>97.7% (209/214, 19 files)</a:t>
                       </a:r>
                       <a:endParaRPr lang="en-US" sz="750" dirty="0">
                         <a:latin typeface="Calibri" charset="0"/>
@@ -11419,7 +11413,7 @@
                           <a:ea typeface="Calibri" pitchFamily="34" charset="-122"/>
                           <a:cs typeface="Calibri" pitchFamily="34" charset="-120"/>
                         </a:rPr>
-                        <a:t>n/a, headline</a:t>
+                        <a:t>headline</a:t>
                       </a:r>
                       <a:endParaRPr lang="en-US" sz="750" dirty="0">
                         <a:latin typeface="Calibri" charset="0"/>
@@ -11616,7 +11610,7 @@
                           <a:ea typeface="Calibri" pitchFamily="34" charset="-122"/>
                           <a:cs typeface="Calibri" pitchFamily="34" charset="-120"/>
                         </a:rPr>
-                        <a:t>n/a, headline</a:t>
+                        <a:t>headline</a:t>
                       </a:r>
                       <a:endParaRPr lang="en-US" sz="750" dirty="0">
                         <a:latin typeface="Calibri" charset="0"/>
@@ -11748,7 +11742,7 @@
                           <a:ea typeface="Calibri" pitchFamily="34" charset="-122"/>
                           <a:cs typeface="Calibri" pitchFamily="34" charset="-120"/>
                         </a:rPr>
-                        <a:t>41 (18 adjudication calls)</a:t>
+                        <a:t>41 (18 calls)</a:t>
                       </a:r>
                       <a:endParaRPr lang="en-US" sz="750" dirty="0">
                         <a:latin typeface="Calibri" charset="0"/>
@@ -11813,7 +11807,7 @@
                           <a:ea typeface="Calibri" pitchFamily="34" charset="-122"/>
                           <a:cs typeface="Calibri" pitchFamily="34" charset="-120"/>
                         </a:rPr>
-                        <a:t>≤2% once warm (NFR-8)</a:t>
+                        <a:t>≤2% warm (NFR-8)</a:t>
                       </a:r>
                       <a:endParaRPr lang="en-US" sz="750" dirty="0">
                         <a:latin typeface="Calibri" charset="0"/>
@@ -12010,7 +12004,7 @@
                           <a:ea typeface="Calibri" pitchFamily="34" charset="-122"/>
                           <a:cs typeface="Calibri" pitchFamily="34" charset="-120"/>
                         </a:rPr>
-                        <a:t>n/a; recall is an honest miss</a:t>
+                        <a:t>honest miss</a:t>
                       </a:r>
                       <a:endParaRPr lang="en-US" sz="750" dirty="0">
                         <a:latin typeface="Calibri" charset="0"/>
@@ -12339,7 +12333,7 @@
                           <a:ea typeface="Calibri" pitchFamily="34" charset="-122"/>
                           <a:cs typeface="Calibri" pitchFamily="34" charset="-120"/>
                         </a:rPr>
-                        <a:t>347 passed / 399 collected, 0 failed</a:t>
+                        <a:t>347 passed, 47 skipped without Postgres, 0 failed</a:t>
                       </a:r>
                       <a:endParaRPr lang="en-US" sz="750" dirty="0">
                         <a:latin typeface="Calibri" charset="0"/>
@@ -12404,7 +12398,7 @@
                           <a:ea typeface="Calibri" pitchFamily="34" charset="-122"/>
                           <a:cs typeface="Calibri" pitchFamily="34" charset="-120"/>
                         </a:rPr>
-                        <a:t>offline, no network</a:t>
+                        <a:t>offline, no net</a:t>
                       </a:r>
                       <a:endParaRPr lang="en-US" sz="750" dirty="0">
                         <a:latin typeface="Calibri" charset="0"/>
@@ -27944,8 +27938,8 @@
         </p:nvSpPr>
         <p:spPr>
           <a:xfrm>
-            <a:off x="594360" y="3200400"/>
-            <a:ext cx="3931920" cy="1188720"/>
+            <a:off x="594360" y="2788920"/>
+            <a:ext cx="3931920" cy="1554480"/>
           </a:xfrm>
           <a:prstGeom prst="rect">
             <a:avLst/>
@@ -28019,6 +28013,27 @@
             </a:r>
             <a:endParaRPr lang="en-US" sz="900" dirty="0"/>
           </a:p>
+          <a:p>
+            <a:pPr marL="342900" indent="-342900">
+              <a:spcAft>
+                <a:spcPts val="400"/>
+              </a:spcAft>
+              <a:buSzPct val="100000"/>
+              <a:buChar char="•"/>
+            </a:pPr>
+            <a:r>
+              <a:rPr lang="en-US" sz="900" dirty="0">
+                <a:solidFill>
+                  <a:srgbClr val="DCE7F5"/>
+                </a:solidFill>
+                <a:latin typeface="Calibri" pitchFamily="34" charset="0"/>
+                <a:ea typeface="Calibri" pitchFamily="34" charset="-122"/>
+                <a:cs typeface="Calibri" pitchFamily="34" charset="-120"/>
+              </a:rPr>
+              <a:t>Measured, not hoped: the second file with a known layout costs zero adjudications, asserted in test_correctness_targets_across_the_corpus, not claimed in prose</a:t>
+            </a:r>
+            <a:endParaRPr lang="en-US" sz="900" dirty="0"/>
+          </a:p>
         </p:txBody>
       </p:sp>
       <p:sp>
@@ -28030,11 +28045,11 @@
         <p:spPr>
           <a:xfrm>
             <a:off x="4937760" y="1188720"/>
-            <a:ext cx="3749040" cy="1024128"/>
+            <a:ext cx="3749040" cy="990600"/>
           </a:xfrm>
           <a:prstGeom prst="roundRect">
             <a:avLst>
-              <a:gd name="adj" fmla="val 5357"/>
+              <a:gd name="adj" fmla="val 5538"/>
             </a:avLst>
           </a:prstGeom>
           <a:solidFill>
@@ -28096,7 +28111,7 @@
         <p:spPr>
           <a:xfrm>
             <a:off x="5029200" y="1499616"/>
-            <a:ext cx="3566160" cy="658368"/>
+            <a:ext cx="3566160" cy="624840"/>
           </a:xfrm>
           <a:prstGeom prst="rect">
             <a:avLst/>
@@ -28134,12 +28149,12 @@
         </p:nvSpPr>
         <p:spPr>
           <a:xfrm>
-            <a:off x="4937760" y="2304288"/>
-            <a:ext cx="3749040" cy="1024128"/>
+            <a:off x="4937760" y="2316480"/>
+            <a:ext cx="3749040" cy="990600"/>
           </a:xfrm>
           <a:prstGeom prst="roundRect">
             <a:avLst>
-              <a:gd name="adj" fmla="val 5357"/>
+              <a:gd name="adj" fmla="val 5538"/>
             </a:avLst>
           </a:prstGeom>
           <a:solidFill>
@@ -28161,7 +28176,7 @@
         </p:nvSpPr>
         <p:spPr>
           <a:xfrm>
-            <a:off x="5029200" y="2359152"/>
+            <a:off x="5029200" y="2371344"/>
             <a:ext cx="3566160" cy="256032"/>
           </a:xfrm>
           <a:prstGeom prst="rect">
@@ -28200,8 +28215,8 @@
         </p:nvSpPr>
         <p:spPr>
           <a:xfrm>
-            <a:off x="5029200" y="2615184"/>
-            <a:ext cx="3566160" cy="658368"/>
+            <a:off x="5029200" y="2627376"/>
+            <a:ext cx="3566160" cy="624840"/>
           </a:xfrm>
           <a:prstGeom prst="rect">
             <a:avLst/>
@@ -28239,12 +28254,12 @@
         </p:nvSpPr>
         <p:spPr>
           <a:xfrm>
-            <a:off x="4937760" y="3419856"/>
-            <a:ext cx="3749040" cy="1024128"/>
+            <a:off x="4937760" y="3444240"/>
+            <a:ext cx="3749040" cy="990600"/>
           </a:xfrm>
           <a:prstGeom prst="roundRect">
             <a:avLst>
-              <a:gd name="adj" fmla="val 5357"/>
+              <a:gd name="adj" fmla="val 5538"/>
             </a:avLst>
           </a:prstGeom>
           <a:solidFill>
@@ -28266,7 +28281,7 @@
         </p:nvSpPr>
         <p:spPr>
           <a:xfrm>
-            <a:off x="5029200" y="3474720"/>
+            <a:off x="5029200" y="3499104"/>
             <a:ext cx="3566160" cy="256032"/>
           </a:xfrm>
           <a:prstGeom prst="rect">
@@ -28305,8 +28320,8 @@
         </p:nvSpPr>
         <p:spPr>
           <a:xfrm>
-            <a:off x="5029200" y="3730752"/>
-            <a:ext cx="3566160" cy="658368"/>
+            <a:off x="5029200" y="3755136"/>
+            <a:ext cx="3566160" cy="624840"/>
           </a:xfrm>
           <a:prstGeom prst="rect">
             <a:avLst/>
@@ -28331,111 +28346,6 @@
                 <a:cs typeface="Calibri" pitchFamily="34" charset="-120"/>
               </a:rPr>
               <a:t>a wrong mapping breaks reconciliation silently; unresolved becomes a review item instead</a:t>
-            </a:r>
-            <a:endParaRPr lang="en-US" sz="900" dirty="0"/>
-          </a:p>
-        </p:txBody>
-      </p:sp>
-      <p:sp>
-        <p:nvSpPr>
-          <p:cNvPr id="18" name="Shape 16"/>
-          <p:cNvSpPr/>
-          <p:nvPr/>
-        </p:nvSpPr>
-        <p:spPr>
-          <a:xfrm>
-            <a:off x="4937760" y="3657600"/>
-            <a:ext cx="3749040" cy="777240"/>
-          </a:xfrm>
-          <a:prstGeom prst="roundRect">
-            <a:avLst>
-              <a:gd name="adj" fmla="val 7059"/>
-            </a:avLst>
-          </a:prstGeom>
-          <a:solidFill>
-            <a:srgbClr val="F3F6FA"/>
-          </a:solidFill>
-          <a:ln w="9525">
-            <a:solidFill>
-              <a:srgbClr val="C9D3E0"/>
-            </a:solidFill>
-            <a:prstDash val="solid"/>
-          </a:ln>
-        </p:spPr>
-      </p:sp>
-      <p:sp>
-        <p:nvSpPr>
-          <p:cNvPr id="19" name="Text 17"/>
-          <p:cNvSpPr txBox="1"/>
-          <p:nvPr/>
-        </p:nvSpPr>
-        <p:spPr>
-          <a:xfrm>
-            <a:off x="5029200" y="3712464"/>
-            <a:ext cx="3566160" cy="256032"/>
-          </a:xfrm>
-          <a:prstGeom prst="rect">
-            <a:avLst/>
-          </a:prstGeom>
-          <a:noFill/>
-          <a:ln/>
-        </p:spPr>
-        <p:txBody>
-          <a:bodyPr wrap="square" lIns="0" tIns="0" rIns="0" bIns="0" rtlCol="0" anchor="ctr"/>
-          <a:lstStyle/>
-          <a:p>
-            <a:pPr indent="0" marL="0">
-              <a:buNone/>
-            </a:pPr>
-            <a:r>
-              <a:rPr lang="en-US" sz="1100" b="1" dirty="0">
-                <a:solidFill>
-                  <a:srgbClr val="14213D"/>
-                </a:solidFill>
-                <a:latin typeface="Calibri" pitchFamily="34" charset="0"/>
-                <a:ea typeface="Calibri" pitchFamily="34" charset="-122"/>
-                <a:cs typeface="Calibri" pitchFamily="34" charset="-120"/>
-              </a:rPr>
-              <a:t>Measured, not hoped</a:t>
-            </a:r>
-            <a:endParaRPr lang="en-US" sz="1100" dirty="0"/>
-          </a:p>
-        </p:txBody>
-      </p:sp>
-      <p:sp>
-        <p:nvSpPr>
-          <p:cNvPr id="20" name="Text 18"/>
-          <p:cNvSpPr txBox="1"/>
-          <p:nvPr/>
-        </p:nvSpPr>
-        <p:spPr>
-          <a:xfrm>
-            <a:off x="5029200" y="3968496"/>
-            <a:ext cx="3566160" cy="411480"/>
-          </a:xfrm>
-          <a:prstGeom prst="rect">
-            <a:avLst/>
-          </a:prstGeom>
-          <a:noFill/>
-          <a:ln/>
-        </p:spPr>
-        <p:txBody>
-          <a:bodyPr wrap="square" lIns="0" tIns="0" rIns="0" bIns="0" rtlCol="0" anchor="t"/>
-          <a:lstStyle/>
-          <a:p>
-            <a:pPr indent="0" marL="0">
-              <a:buNone/>
-            </a:pPr>
-            <a:r>
-              <a:rPr lang="en-US" sz="900" dirty="0">
-                <a:solidFill>
-                  <a:srgbClr val="1B2A41"/>
-                </a:solidFill>
-                <a:latin typeface="Calibri" pitchFamily="34" charset="0"/>
-                <a:ea typeface="Calibri" pitchFamily="34" charset="-122"/>
-                <a:cs typeface="Calibri" pitchFamily="34" charset="-120"/>
-              </a:rPr>
-              <a:t>Second file with a known layout costs zero adjudications — asserted in test_correctness_targets_across_the_corpus, not claimed in prose.</a:t>
             </a:r>
             <a:endParaRPr lang="en-US" sz="900" dirty="0"/>
           </a:p>
